--- a/diffusion_ssd_slides.pptx
+++ b/diffusion_ssd_slides.pptx
@@ -3910,7 +3910,7 @@
               </a:defRPr>
             </a:pPr>
             <a:r>
-              <a:t>Results</a:t>
+              <a:t>Results: AR drafting wins at scale; BD3-LM drafter is the bottleneck</a:t>
             </a:r>
           </a:p>
         </p:txBody>
@@ -3966,8 +3966,8 @@
         </p:nvSpPr>
         <p:spPr>
           <a:xfrm>
-            <a:off x="640080" y="1554480"/>
-            <a:ext cx="10972800" cy="4572000"/>
+            <a:off x="548640" y="1097280"/>
+            <a:ext cx="11064240" cy="457200"/>
           </a:xfrm>
           <a:prstGeom prst="rect">
             <a:avLst/>
@@ -3981,14 +3981,777 @@
           <a:lstStyle/>
           <a:p>
             <a:pPr>
-              <a:defRPr sz="2000" i="1">
+              <a:defRPr sz="1400" i="1">
                 <a:solidFill>
                   <a:srgbClr val="AAAAAA"/>
                 </a:solidFill>
               </a:defRPr>
             </a:pPr>
             <a:r>
-              <a:t>[ results to be added ]</a:t>
+              <a:t>1×H100, Qwen3 family, sync SD, temp=0, 512 output tokens; humaneval / alpaca / gsm8k / ultrafeedback.</a:t>
+            </a:r>
+          </a:p>
+        </p:txBody>
+      </p:sp>
+      <p:graphicFrame>
+        <p:nvGraphicFramePr>
+          <p:cNvPr id="5" name="Table 4"/>
+          <p:cNvGraphicFramePr>
+            <a:graphicFrameLocks noGrp="1"/>
+          </p:cNvGraphicFramePr>
+          <p:nvPr/>
+        </p:nvGraphicFramePr>
+        <p:xfrm>
+          <a:off x="548640" y="1600200"/>
+          <a:ext cx="8595360" cy="2560320"/>
+        </p:xfrm>
+        <a:graphic>
+          <a:graphicData uri="http://schemas.openxmlformats.org/drawingml/2006/table">
+            <a:tbl>
+              <a:tblPr firstRow="1" bandRow="1">
+                <a:tableStyleId>{5C22544A-7EE6-4342-B048-85BDC9FD1C3A}</a:tableStyleId>
+              </a:tblPr>
+              <a:tblGrid>
+                <a:gridCol w="1463040"/>
+                <a:gridCol w="4023360"/>
+                <a:gridCol w="1828800"/>
+                <a:gridCol w="1280160"/>
+              </a:tblGrid>
+              <a:tr h="365760">
+                <a:tc>
+                  <a:txBody>
+                    <a:bodyPr wrap="square"/>
+                    <a:lstStyle/>
+                    <a:p>
+                      <a:r>
+                        <a:rPr sz="1300" b="1">
+                          <a:solidFill>
+                            <a:srgbClr val="FFFFFF"/>
+                          </a:solidFill>
+                        </a:rPr>
+                        <a:t>Target</a:t>
+                      </a:r>
+                    </a:p>
+                  </a:txBody>
+                  <a:tcPr>
+                    <a:solidFill>
+                      <a:srgbClr val="0B1F3A"/>
+                    </a:solidFill>
+                  </a:tcPr>
+                </a:tc>
+                <a:tc>
+                  <a:txBody>
+                    <a:bodyPr wrap="square"/>
+                    <a:lstStyle/>
+                    <a:p>
+                      <a:r>
+                        <a:rPr sz="1300" b="1">
+                          <a:solidFill>
+                            <a:srgbClr val="FFFFFF"/>
+                          </a:solidFill>
+                        </a:rPr>
+                        <a:t>Drafter</a:t>
+                      </a:r>
+                    </a:p>
+                  </a:txBody>
+                  <a:tcPr>
+                    <a:solidFill>
+                      <a:srgbClr val="0B1F3A"/>
+                    </a:solidFill>
+                  </a:tcPr>
+                </a:tc>
+                <a:tc>
+                  <a:txBody>
+                    <a:bodyPr wrap="square"/>
+                    <a:lstStyle/>
+                    <a:p>
+                      <a:r>
+                        <a:rPr sz="1300" b="1">
+                          <a:solidFill>
+                            <a:srgbClr val="FFFFFF"/>
+                          </a:solidFill>
+                        </a:rPr>
+                        <a:t>Throughput (tok/s)</a:t>
+                      </a:r>
+                    </a:p>
+                  </a:txBody>
+                  <a:tcPr>
+                    <a:solidFill>
+                      <a:srgbClr val="0B1F3A"/>
+                    </a:solidFill>
+                  </a:tcPr>
+                </a:tc>
+                <a:tc>
+                  <a:txBody>
+                    <a:bodyPr wrap="square"/>
+                    <a:lstStyle/>
+                    <a:p>
+                      <a:r>
+                        <a:rPr sz="1300" b="1">
+                          <a:solidFill>
+                            <a:srgbClr val="FFFFFF"/>
+                          </a:solidFill>
+                        </a:rPr>
+                        <a:t>vs baseline</a:t>
+                      </a:r>
+                    </a:p>
+                  </a:txBody>
+                  <a:tcPr>
+                    <a:solidFill>
+                      <a:srgbClr val="0B1F3A"/>
+                    </a:solidFill>
+                  </a:tcPr>
+                </a:tc>
+              </a:tr>
+              <a:tr h="365760">
+                <a:tc>
+                  <a:txBody>
+                    <a:bodyPr wrap="square"/>
+                    <a:lstStyle/>
+                    <a:p>
+                      <a:r>
+                        <a:rPr sz="1300">
+                          <a:solidFill>
+                            <a:srgbClr val="444444"/>
+                          </a:solidFill>
+                        </a:rPr>
+                        <a:t>Qwen3-1.7B</a:t>
+                      </a:r>
+                    </a:p>
+                  </a:txBody>
+                  <a:tcPr>
+                    <a:solidFill>
+                      <a:srgbClr val="FFFFFF"/>
+                    </a:solidFill>
+                  </a:tcPr>
+                </a:tc>
+                <a:tc>
+                  <a:txBody>
+                    <a:bodyPr wrap="square"/>
+                    <a:lstStyle/>
+                    <a:p>
+                      <a:r>
+                        <a:rPr sz="1300">
+                          <a:solidFill>
+                            <a:srgbClr val="444444"/>
+                          </a:solidFill>
+                        </a:rPr>
+                        <a:t>AR baseline (no spec)</a:t>
+                      </a:r>
+                    </a:p>
+                  </a:txBody>
+                  <a:tcPr>
+                    <a:solidFill>
+                      <a:srgbClr val="FFFFFF"/>
+                    </a:solidFill>
+                  </a:tcPr>
+                </a:tc>
+                <a:tc>
+                  <a:txBody>
+                    <a:bodyPr wrap="square"/>
+                    <a:lstStyle/>
+                    <a:p>
+                      <a:r>
+                        <a:rPr sz="1300">
+                          <a:solidFill>
+                            <a:srgbClr val="444444"/>
+                          </a:solidFill>
+                        </a:rPr>
+                        <a:t>393</a:t>
+                      </a:r>
+                    </a:p>
+                  </a:txBody>
+                  <a:tcPr>
+                    <a:solidFill>
+                      <a:srgbClr val="FFFFFF"/>
+                    </a:solidFill>
+                  </a:tcPr>
+                </a:tc>
+                <a:tc>
+                  <a:txBody>
+                    <a:bodyPr wrap="square"/>
+                    <a:lstStyle/>
+                    <a:p>
+                      <a:r>
+                        <a:rPr sz="1300">
+                          <a:solidFill>
+                            <a:srgbClr val="444444"/>
+                          </a:solidFill>
+                        </a:rPr>
+                        <a:t>1.00×</a:t>
+                      </a:r>
+                    </a:p>
+                  </a:txBody>
+                  <a:tcPr>
+                    <a:solidFill>
+                      <a:srgbClr val="FFFFFF"/>
+                    </a:solidFill>
+                  </a:tcPr>
+                </a:tc>
+              </a:tr>
+              <a:tr h="365760">
+                <a:tc>
+                  <a:txBody>
+                    <a:bodyPr wrap="square"/>
+                    <a:lstStyle/>
+                    <a:p>
+                      <a:r>
+                        <a:rPr sz="1300">
+                          <a:solidFill>
+                            <a:srgbClr val="444444"/>
+                          </a:solidFill>
+                        </a:rPr>
+                        <a:t>Qwen3-1.7B</a:t>
+                      </a:r>
+                    </a:p>
+                  </a:txBody>
+                  <a:tcPr>
+                    <a:solidFill>
+                      <a:srgbClr val="FFFFFF"/>
+                    </a:solidFill>
+                  </a:tcPr>
+                </a:tc>
+                <a:tc>
+                  <a:txBody>
+                    <a:bodyPr wrap="square"/>
+                    <a:lstStyle/>
+                    <a:p>
+                      <a:r>
+                        <a:rPr sz="1300">
+                          <a:solidFill>
+                            <a:srgbClr val="444444"/>
+                          </a:solidFill>
+                        </a:rPr>
+                        <a:t>Sync SD + AR draft (Qwen3-0.6B, k=6)</a:t>
+                      </a:r>
+                    </a:p>
+                  </a:txBody>
+                  <a:tcPr>
+                    <a:solidFill>
+                      <a:srgbClr val="FFFFFF"/>
+                    </a:solidFill>
+                  </a:tcPr>
+                </a:tc>
+                <a:tc>
+                  <a:txBody>
+                    <a:bodyPr wrap="square"/>
+                    <a:lstStyle/>
+                    <a:p>
+                      <a:r>
+                        <a:rPr sz="1300">
+                          <a:solidFill>
+                            <a:srgbClr val="444444"/>
+                          </a:solidFill>
+                        </a:rPr>
+                        <a:t>285</a:t>
+                      </a:r>
+                    </a:p>
+                  </a:txBody>
+                  <a:tcPr>
+                    <a:solidFill>
+                      <a:srgbClr val="FFFFFF"/>
+                    </a:solidFill>
+                  </a:tcPr>
+                </a:tc>
+                <a:tc>
+                  <a:txBody>
+                    <a:bodyPr wrap="square"/>
+                    <a:lstStyle/>
+                    <a:p>
+                      <a:r>
+                        <a:rPr sz="1300">
+                          <a:solidFill>
+                            <a:srgbClr val="444444"/>
+                          </a:solidFill>
+                        </a:rPr>
+                        <a:t>0.72×</a:t>
+                      </a:r>
+                    </a:p>
+                  </a:txBody>
+                  <a:tcPr>
+                    <a:solidFill>
+                      <a:srgbClr val="FFFFFF"/>
+                    </a:solidFill>
+                  </a:tcPr>
+                </a:tc>
+              </a:tr>
+              <a:tr h="365760">
+                <a:tc>
+                  <a:txBody>
+                    <a:bodyPr wrap="square"/>
+                    <a:lstStyle/>
+                    <a:p>
+                      <a:r>
+                        <a:rPr sz="1300">
+                          <a:solidFill>
+                            <a:srgbClr val="444444"/>
+                          </a:solidFill>
+                        </a:rPr>
+                        <a:t>Qwen3-1.7B</a:t>
+                      </a:r>
+                    </a:p>
+                  </a:txBody>
+                  <a:tcPr>
+                    <a:solidFill>
+                      <a:srgbClr val="FFFFFF"/>
+                    </a:solidFill>
+                  </a:tcPr>
+                </a:tc>
+                <a:tc>
+                  <a:txBody>
+                    <a:bodyPr wrap="square"/>
+                    <a:lstStyle/>
+                    <a:p>
+                      <a:r>
+                        <a:rPr sz="1300">
+                          <a:solidFill>
+                            <a:srgbClr val="444444"/>
+                          </a:solidFill>
+                        </a:rPr>
+                        <a:t>Sync SD + BD3-LM diffusion draft (k=15)</a:t>
+                      </a:r>
+                    </a:p>
+                  </a:txBody>
+                  <a:tcPr>
+                    <a:solidFill>
+                      <a:srgbClr val="FFFFFF"/>
+                    </a:solidFill>
+                  </a:tcPr>
+                </a:tc>
+                <a:tc>
+                  <a:txBody>
+                    <a:bodyPr wrap="square"/>
+                    <a:lstStyle/>
+                    <a:p>
+                      <a:r>
+                        <a:rPr sz="1300">
+                          <a:solidFill>
+                            <a:srgbClr val="444444"/>
+                          </a:solidFill>
+                        </a:rPr>
+                        <a:t>17</a:t>
+                      </a:r>
+                    </a:p>
+                  </a:txBody>
+                  <a:tcPr>
+                    <a:solidFill>
+                      <a:srgbClr val="FFFFFF"/>
+                    </a:solidFill>
+                  </a:tcPr>
+                </a:tc>
+                <a:tc>
+                  <a:txBody>
+                    <a:bodyPr wrap="square"/>
+                    <a:lstStyle/>
+                    <a:p>
+                      <a:r>
+                        <a:rPr sz="1300">
+                          <a:solidFill>
+                            <a:srgbClr val="444444"/>
+                          </a:solidFill>
+                        </a:rPr>
+                        <a:t>0.04×</a:t>
+                      </a:r>
+                    </a:p>
+                  </a:txBody>
+                  <a:tcPr>
+                    <a:solidFill>
+                      <a:srgbClr val="FFFFFF"/>
+                    </a:solidFill>
+                  </a:tcPr>
+                </a:tc>
+              </a:tr>
+              <a:tr h="365760">
+                <a:tc>
+                  <a:txBody>
+                    <a:bodyPr wrap="square"/>
+                    <a:lstStyle/>
+                    <a:p>
+                      <a:r>
+                        <a:rPr sz="1300">
+                          <a:solidFill>
+                            <a:srgbClr val="444444"/>
+                          </a:solidFill>
+                        </a:rPr>
+                        <a:t>Qwen3-8B</a:t>
+                      </a:r>
+                    </a:p>
+                  </a:txBody>
+                  <a:tcPr>
+                    <a:solidFill>
+                      <a:srgbClr val="FFFFFF"/>
+                    </a:solidFill>
+                  </a:tcPr>
+                </a:tc>
+                <a:tc>
+                  <a:txBody>
+                    <a:bodyPr wrap="square"/>
+                    <a:lstStyle/>
+                    <a:p>
+                      <a:r>
+                        <a:rPr sz="1300">
+                          <a:solidFill>
+                            <a:srgbClr val="444444"/>
+                          </a:solidFill>
+                        </a:rPr>
+                        <a:t>AR baseline (no spec)</a:t>
+                      </a:r>
+                    </a:p>
+                  </a:txBody>
+                  <a:tcPr>
+                    <a:solidFill>
+                      <a:srgbClr val="FFFFFF"/>
+                    </a:solidFill>
+                  </a:tcPr>
+                </a:tc>
+                <a:tc>
+                  <a:txBody>
+                    <a:bodyPr wrap="square"/>
+                    <a:lstStyle/>
+                    <a:p>
+                      <a:r>
+                        <a:rPr sz="1300">
+                          <a:solidFill>
+                            <a:srgbClr val="444444"/>
+                          </a:solidFill>
+                        </a:rPr>
+                        <a:t>147</a:t>
+                      </a:r>
+                    </a:p>
+                  </a:txBody>
+                  <a:tcPr>
+                    <a:solidFill>
+                      <a:srgbClr val="FFFFFF"/>
+                    </a:solidFill>
+                  </a:tcPr>
+                </a:tc>
+                <a:tc>
+                  <a:txBody>
+                    <a:bodyPr wrap="square"/>
+                    <a:lstStyle/>
+                    <a:p>
+                      <a:r>
+                        <a:rPr sz="1300">
+                          <a:solidFill>
+                            <a:srgbClr val="444444"/>
+                          </a:solidFill>
+                        </a:rPr>
+                        <a:t>1.00×</a:t>
+                      </a:r>
+                    </a:p>
+                  </a:txBody>
+                  <a:tcPr>
+                    <a:solidFill>
+                      <a:srgbClr val="FFFFFF"/>
+                    </a:solidFill>
+                  </a:tcPr>
+                </a:tc>
+              </a:tr>
+              <a:tr h="365760">
+                <a:tc>
+                  <a:txBody>
+                    <a:bodyPr wrap="square"/>
+                    <a:lstStyle/>
+                    <a:p>
+                      <a:r>
+                        <a:rPr sz="1300" b="1">
+                          <a:solidFill>
+                            <a:srgbClr val="C81D25"/>
+                          </a:solidFill>
+                        </a:rPr>
+                        <a:t>Qwen3-8B</a:t>
+                      </a:r>
+                    </a:p>
+                  </a:txBody>
+                  <a:tcPr>
+                    <a:solidFill>
+                      <a:srgbClr val="FFFFFF"/>
+                    </a:solidFill>
+                  </a:tcPr>
+                </a:tc>
+                <a:tc>
+                  <a:txBody>
+                    <a:bodyPr wrap="square"/>
+                    <a:lstStyle/>
+                    <a:p>
+                      <a:r>
+                        <a:rPr sz="1300" b="1">
+                          <a:solidFill>
+                            <a:srgbClr val="C81D25"/>
+                          </a:solidFill>
+                        </a:rPr>
+                        <a:t>Sync SD + AR draft (Qwen3-0.6B, k=6)</a:t>
+                      </a:r>
+                    </a:p>
+                  </a:txBody>
+                  <a:tcPr>
+                    <a:solidFill>
+                      <a:srgbClr val="FFFFFF"/>
+                    </a:solidFill>
+                  </a:tcPr>
+                </a:tc>
+                <a:tc>
+                  <a:txBody>
+                    <a:bodyPr wrap="square"/>
+                    <a:lstStyle/>
+                    <a:p>
+                      <a:r>
+                        <a:rPr sz="1300" b="1">
+                          <a:solidFill>
+                            <a:srgbClr val="C81D25"/>
+                          </a:solidFill>
+                        </a:rPr>
+                        <a:t>193</a:t>
+                      </a:r>
+                    </a:p>
+                  </a:txBody>
+                  <a:tcPr>
+                    <a:solidFill>
+                      <a:srgbClr val="FFFFFF"/>
+                    </a:solidFill>
+                  </a:tcPr>
+                </a:tc>
+                <a:tc>
+                  <a:txBody>
+                    <a:bodyPr wrap="square"/>
+                    <a:lstStyle/>
+                    <a:p>
+                      <a:r>
+                        <a:rPr sz="1300" b="1">
+                          <a:solidFill>
+                            <a:srgbClr val="C81D25"/>
+                          </a:solidFill>
+                        </a:rPr>
+                        <a:t>1.31×</a:t>
+                      </a:r>
+                    </a:p>
+                  </a:txBody>
+                  <a:tcPr>
+                    <a:solidFill>
+                      <a:srgbClr val="FFFFFF"/>
+                    </a:solidFill>
+                  </a:tcPr>
+                </a:tc>
+              </a:tr>
+              <a:tr h="365760">
+                <a:tc>
+                  <a:txBody>
+                    <a:bodyPr wrap="square"/>
+                    <a:lstStyle/>
+                    <a:p>
+                      <a:r>
+                        <a:rPr sz="1300">
+                          <a:solidFill>
+                            <a:srgbClr val="444444"/>
+                          </a:solidFill>
+                        </a:rPr>
+                        <a:t>Qwen3-8B</a:t>
+                      </a:r>
+                    </a:p>
+                  </a:txBody>
+                  <a:tcPr>
+                    <a:solidFill>
+                      <a:srgbClr val="FFFFFF"/>
+                    </a:solidFill>
+                  </a:tcPr>
+                </a:tc>
+                <a:tc>
+                  <a:txBody>
+                    <a:bodyPr wrap="square"/>
+                    <a:lstStyle/>
+                    <a:p>
+                      <a:r>
+                        <a:rPr sz="1300">
+                          <a:solidFill>
+                            <a:srgbClr val="444444"/>
+                          </a:solidFill>
+                        </a:rPr>
+                        <a:t>Sync SD + BD3-LM diffusion draft (k=15)</a:t>
+                      </a:r>
+                    </a:p>
+                  </a:txBody>
+                  <a:tcPr>
+                    <a:solidFill>
+                      <a:srgbClr val="FFFFFF"/>
+                    </a:solidFill>
+                  </a:tcPr>
+                </a:tc>
+                <a:tc>
+                  <a:txBody>
+                    <a:bodyPr wrap="square"/>
+                    <a:lstStyle/>
+                    <a:p>
+                      <a:r>
+                        <a:rPr sz="1300">
+                          <a:solidFill>
+                            <a:srgbClr val="444444"/>
+                          </a:solidFill>
+                        </a:rPr>
+                        <a:t>20</a:t>
+                      </a:r>
+                    </a:p>
+                  </a:txBody>
+                  <a:tcPr>
+                    <a:solidFill>
+                      <a:srgbClr val="FFFFFF"/>
+                    </a:solidFill>
+                  </a:tcPr>
+                </a:tc>
+                <a:tc>
+                  <a:txBody>
+                    <a:bodyPr wrap="square"/>
+                    <a:lstStyle/>
+                    <a:p>
+                      <a:r>
+                        <a:rPr sz="1300">
+                          <a:solidFill>
+                            <a:srgbClr val="444444"/>
+                          </a:solidFill>
+                        </a:rPr>
+                        <a:t>0.13×</a:t>
+                      </a:r>
+                    </a:p>
+                  </a:txBody>
+                  <a:tcPr>
+                    <a:solidFill>
+                      <a:srgbClr val="FFFFFF"/>
+                    </a:solidFill>
+                  </a:tcPr>
+                </a:tc>
+              </a:tr>
+            </a:tbl>
+          </a:graphicData>
+        </a:graphic>
+      </p:graphicFrame>
+      <p:sp>
+        <p:nvSpPr>
+          <p:cNvPr id="6" name="TextBox 5"/>
+          <p:cNvSpPr txBox="1"/>
+          <p:nvPr/>
+        </p:nvSpPr>
+        <p:spPr>
+          <a:xfrm>
+            <a:off x="9326880" y="1600200"/>
+            <a:ext cx="2697480" cy="4572000"/>
+          </a:xfrm>
+          <a:prstGeom prst="rect">
+            <a:avLst/>
+          </a:prstGeom>
+          <a:noFill/>
+        </p:spPr>
+        <p:txBody>
+          <a:bodyPr wrap="square">
+            <a:spAutoFit/>
+          </a:bodyPr>
+          <a:lstStyle/>
+          <a:p>
+            <a:pPr>
+              <a:spcAft>
+                <a:spcPts val="600"/>
+              </a:spcAft>
+              <a:defRPr sz="1600" b="1">
+                <a:solidFill>
+                  <a:srgbClr val="0B1F3A"/>
+                </a:solidFill>
+              </a:defRPr>
+            </a:pPr>
+            <a:r>
+              <a:t>Findings</a:t>
+            </a:r>
+          </a:p>
+          <a:p>
+            <a:pPr>
+              <a:spcAft>
+                <a:spcPts val="600"/>
+              </a:spcAft>
+              <a:defRPr sz="1100">
+                <a:solidFill>
+                  <a:srgbClr val="444444"/>
+                </a:solidFill>
+              </a:defRPr>
+            </a:pPr>
+            <a:r>
+              <a:t>•  AR-SD reaches its win regime at 8B target (1.31×). Confirms the setup is correct.</a:t>
+            </a:r>
+          </a:p>
+          <a:p>
+            <a:pPr>
+              <a:spcAft>
+                <a:spcPts val="600"/>
+              </a:spcAft>
+              <a:defRPr sz="1100">
+                <a:solidFill>
+                  <a:srgbClr val="444444"/>
+                </a:solidFill>
+              </a:defRPr>
+            </a:pPr>
+            <a:r>
+              <a:t>•  At 1.7B target, even AR-SD is net-slower; draft overhead dominates.</a:t>
+            </a:r>
+          </a:p>
+          <a:p>
+            <a:pPr>
+              <a:spcAft>
+                <a:spcPts val="600"/>
+              </a:spcAft>
+              <a:defRPr sz="1100">
+                <a:solidFill>
+                  <a:srgbClr val="444444"/>
+                </a:solidFill>
+              </a:defRPr>
+            </a:pPr>
+            <a:r>
+              <a:t>•  BD3-LM diffusion draft yields ~17–20 tok/s regardless of target size — the drafter itself is the bottleneck, not the verifier.</a:t>
+            </a:r>
+          </a:p>
+          <a:p>
+            <a:pPr>
+              <a:spcAft>
+                <a:spcPts val="600"/>
+              </a:spcAft>
+              <a:defRPr sz="1100">
+                <a:solidFill>
+                  <a:srgbClr val="444444"/>
+                </a:solidFill>
+              </a:defRPr>
+            </a:pPr>
+            <a:r>
+              <a:t>•  Block backend lacks the CUDA-graph / JIT path the AR drafter uses; 4 refine steps × 0.6B params per cycle dominate latency.</a:t>
+            </a:r>
+          </a:p>
+        </p:txBody>
+      </p:sp>
+      <p:sp>
+        <p:nvSpPr>
+          <p:cNvPr id="7" name="TextBox 6"/>
+          <p:cNvSpPr txBox="1"/>
+          <p:nvPr/>
+        </p:nvSpPr>
+        <p:spPr>
+          <a:xfrm>
+            <a:off x="548640" y="5989320"/>
+            <a:ext cx="11064240" cy="640080"/>
+          </a:xfrm>
+          <a:prstGeom prst="rect">
+            <a:avLst/>
+          </a:prstGeom>
+          <a:noFill/>
+        </p:spPr>
+        <p:txBody>
+          <a:bodyPr wrap="square">
+            <a:spAutoFit/>
+          </a:bodyPr>
+          <a:lstStyle/>
+          <a:p>
+            <a:pPr>
+              <a:defRPr sz="1000" i="1">
+                <a:solidFill>
+                  <a:srgbClr val="AAAAAA"/>
+                </a:solidFill>
+              </a:defRPr>
+            </a:pPr>
+            <a:r>
+              <a:t>Caveats: numseqs differs across runs (A/B = 512 prompts, A8/B8 = 256, C = 128, C8 = 64) — throughput is per-token average. Async SSD with diffusion drafter not measured: codebase requires sync mode for --draft-backend block.</a:t>
             </a:r>
           </a:p>
         </p:txBody>
